--- a/docs/presentacion/Vigia-eew-analisis-y-roadmap.pptx
+++ b/docs/presentacion/Vigia-eew-analisis-y-roadmap.pptx
@@ -8209,7 +8209,7 @@
                 <a:ea typeface="Calibri" pitchFamily="34" charset="-122"/>
                 <a:cs typeface="Calibri" pitchFamily="34" charset="-120"/>
               </a:rPr>
-              <a:t>10 backlinks en el código</a:t>
+              <a:t>11 backlinks en el código</a:t>
             </a:r>
             <a:endParaRPr lang="en-US" sz="1300" dirty="0"/>
           </a:p>
@@ -8268,7 +8268,7 @@
                 <a:ea typeface="Calibri" pitchFamily="34" charset="-122"/>
                 <a:cs typeface="Calibri" pitchFamily="34" charset="-120"/>
               </a:rPr>
-              <a:t>Mantenida a mano</a:t>
+              <a:t>A mano · no versionada</a:t>
             </a:r>
             <a:endParaRPr lang="en-US" sz="1200" dirty="0"/>
           </a:p>
